--- a/docs/Tourism_Wellness_MLOps_Presentation_v1.0.pptx
+++ b/docs/Tourism_Wellness_MLOps_Presentation_v1.0.pptx
@@ -26431,8 +26431,8 @@
         </p:nvCxnSpPr>
         <p:spPr>
           <a:xfrm>
-            <a:off x="2880360" y="3360420.0"/>
-            <a:ext cx="411480" cy="0.0"/>
+            <a:off x="2880360" y="3360420"/>
+            <a:ext cx="411480" cy="0"/>
           </a:xfrm>
           <a:prstGeom prst="line">
             <a:avLst/>
@@ -26595,8 +26595,8 @@
         </p:nvCxnSpPr>
         <p:spPr>
           <a:xfrm>
-            <a:off x="5760720" y="3360420.0"/>
-            <a:ext cx="411480" cy="0.0"/>
+            <a:off x="5760720" y="3360420"/>
+            <a:ext cx="411480" cy="0"/>
           </a:xfrm>
           <a:prstGeom prst="line">
             <a:avLst/>
